--- a/reports/12-business-case.pptx
+++ b/reports/12-business-case.pptx
@@ -107,7 +107,7 @@
   <p:extLst>
     <p:ext uri="{521415D9-36F7-43E2-AB2F-B90AF26B5E84}">
       <p14:sectionLst xmlns:p14="http://schemas.microsoft.com/office/powerpoint/2010/main">
-        <p14:section name="Business case" id="{c312ba11-d8c7-85c2-b33e-1d414865ac66}">
+        <p14:section name="Business case" id="{cbf57d32-0982-1fba-4d10-5eb621a936fd}">
           <p14:sldIdLst>
             <p14:sldId id="256"/>
           </p14:sldIdLst>
@@ -190,7 +190,7 @@
               <a:lstStyle/>
               <a:p>
                 <a:pPr>
-                  <a:defRPr b="0" i="0" strike="noStrike" sz="900" u="none">
+                  <a:defRPr b="0" i="0" strike="noStrike" sz="1000" u="none">
                     <a:solidFill>
                       <a:srgbClr val="5C5C5C"/>
                     </a:solidFill>
@@ -438,7 +438,7 @@
             <a:lstStyle/>
             <a:p>
               <a:pPr>
-                <a:defRPr b="0" i="0" strike="noStrike" sz="900" u="none">
+                <a:defRPr b="0" i="0" strike="noStrike" sz="1000" u="none">
                   <a:solidFill>
                     <a:srgbClr val="5C5C5C"/>
                   </a:solidFill>
@@ -2105,7 +2105,7 @@
         </p:nvGraphicFramePr>
         <p:xfrm>
           <a:off x="457200" y="3063240"/>
-          <a:ext cx="5852160" cy="3200400"/>
+          <a:ext cx="5852160" cy="3154680"/>
         </p:xfrm>
         <a:graphic xmlns:a="http://schemas.openxmlformats.org/drawingml/2006/main">
           <a:graphicData uri="http://schemas.openxmlformats.org/drawingml/2006/chart">
@@ -2233,7 +2233,7 @@
         </p:nvSpPr>
         <p:spPr>
           <a:xfrm>
-            <a:off x="6629400" y="4114800"/>
+            <a:off x="6629400" y="4069080"/>
             <a:ext cx="5105095" cy="228600"/>
           </a:xfrm>
           <a:prstGeom prst="rect">
@@ -2269,7 +2269,7 @@
         </p:nvSpPr>
         <p:spPr>
           <a:xfrm>
-            <a:off x="6629400" y="4361688"/>
+            <a:off x="6629400" y="4315968"/>
             <a:ext cx="5105095" cy="448056"/>
           </a:xfrm>
           <a:prstGeom prst="rect">
@@ -2327,7 +2327,7 @@
         </p:nvSpPr>
         <p:spPr>
           <a:xfrm>
-            <a:off x="6629400" y="4965192"/>
+            <a:off x="6629400" y="4873752"/>
             <a:ext cx="5105095" cy="228600"/>
           </a:xfrm>
           <a:prstGeom prst="rect">
@@ -2363,7 +2363,7 @@
         </p:nvSpPr>
         <p:spPr>
           <a:xfrm>
-            <a:off x="6629400" y="5212080"/>
+            <a:off x="6629400" y="5120640"/>
             <a:ext cx="5105095" cy="448056"/>
           </a:xfrm>
           <a:prstGeom prst="rect">
@@ -2407,7 +2407,7 @@
                   <a:schemeClr val="tx1"/>
                 </a:solidFill>
               </a:rPr>
-              <a:t>Customer fairness → Compliance-approved scripts and a pre-launch conduct review</a:t>
+              <a:t>Fairness → Compliance-approved scripts and a pre-launch conduct review</a:t>
             </a:r>
             <a:endParaRPr lang="en-US" sz="1150" dirty="0"/>
           </a:p>
@@ -2421,12 +2421,12 @@
         </p:nvSpPr>
         <p:spPr>
           <a:xfrm>
-            <a:off x="6629400" y="6400800"/>
-            <a:ext cx="5105095" cy="777240"/>
+            <a:off x="6629400" y="5550408"/>
+            <a:ext cx="5105095" cy="713232"/>
           </a:xfrm>
           <a:prstGeom prst="roundRect">
             <a:avLst>
-              <a:gd name="adj" fmla="val 9412"/>
+              <a:gd name="adj" fmla="val 10256"/>
             </a:avLst>
           </a:prstGeom>
           <a:solidFill>
@@ -2443,8 +2443,8 @@
         </p:nvSpPr>
         <p:spPr>
           <a:xfrm>
-            <a:off x="6812280" y="6492240"/>
-            <a:ext cx="4739335" cy="594360"/>
+            <a:off x="6812280" y="5623560"/>
+            <a:ext cx="4739335" cy="566928"/>
           </a:xfrm>
           <a:prstGeom prst="rect">
             <a:avLst/>
